--- a/appunti/Presentazione_Design_Pattern_Java.pptx
+++ b/appunti/Presentazione_Design_Pattern_Java.pptx
@@ -3134,6 +3134,7 @@
               <a:defRPr sz="3000" b="1"/>
             </a:pPr>
             <a:r>
+              <a:rPr/>
               <a:t>Design Pattern in Java</a:t>
             </a:r>
           </a:p>
@@ -3165,6 +3166,7 @@
               <a:defRPr sz="1500"/>
             </a:pPr>
             <a:r>
+              <a:rPr/>
               <a:t>Soluzioni riutilizzabili per problemi ricorrenti di progettazione</a:t>
             </a:r>
           </a:p>
@@ -3199,6 +3201,7 @@
               <a:defRPr sz="2300"/>
             </a:pPr>
             <a:r>
+              <a:rPr/>
               <a:t>Cosa sono i Design Pattern</a:t>
             </a:r>
           </a:p>
@@ -3210,6 +3213,7 @@
               <a:defRPr sz="2300"/>
             </a:pPr>
             <a:r>
+              <a:rPr/>
               <a:t>Classificazione GoF: creazionali, strutturali, comportamentali</a:t>
             </a:r>
           </a:p>
@@ -3221,6 +3225,7 @@
               <a:defRPr sz="2300"/>
             </a:pPr>
             <a:r>
+              <a:rPr/>
               <a:t>I principali pattern studiati nel corso</a:t>
             </a:r>
           </a:p>
@@ -3232,6 +3237,7 @@
               <a:defRPr sz="2300"/>
             </a:pPr>
             <a:r>
+              <a:rPr/>
               <a:t>Come riconoscere quando un pattern è utile</a:t>
             </a:r>
           </a:p>
@@ -3281,6 +3287,7 @@
               <a:defRPr sz="3000" b="1"/>
             </a:pPr>
             <a:r>
+              <a:rPr/>
               <a:t>Prototype Pattern</a:t>
             </a:r>
           </a:p>
@@ -3315,6 +3322,7 @@
               <a:defRPr sz="2200"/>
             </a:pPr>
             <a:r>
+              <a:rPr/>
               <a:t>Creazionale.</a:t>
             </a:r>
           </a:p>
@@ -3326,6 +3334,7 @@
               <a:defRPr sz="2200"/>
             </a:pPr>
             <a:r>
+              <a:rPr/>
               <a:t>Crea nuovi oggetti duplicando oggetti esistenti.</a:t>
             </a:r>
           </a:p>
@@ -3337,6 +3346,7 @@
               <a:defRPr sz="2200"/>
             </a:pPr>
             <a:r>
+              <a:rPr/>
               <a:t>Evita di dipendere direttamente dalla classe concreta per la creazione.</a:t>
             </a:r>
           </a:p>
@@ -3348,6 +3358,7 @@
               <a:defRPr sz="2200"/>
             </a:pPr>
             <a:r>
+              <a:rPr/>
               <a:t>Si basa sull'idea di clonazione/prototipo.</a:t>
             </a:r>
           </a:p>
@@ -3397,6 +3408,7 @@
               <a:defRPr sz="3000" b="1"/>
             </a:pPr>
             <a:r>
+              <a:rPr/>
               <a:t>Decorator Pattern</a:t>
             </a:r>
           </a:p>
@@ -3428,6 +3440,7 @@
               <a:defRPr sz="1500"/>
             </a:pPr>
             <a:r>
+              <a:rPr/>
               <a:t>Strutturale — aggiungere responsabilità dinamicamente</a:t>
             </a:r>
           </a:p>
@@ -3462,6 +3475,7 @@
               <a:defRPr sz="2000"/>
             </a:pPr>
             <a:r>
+              <a:rPr/>
               <a:t>Avvolge un oggetto e ne estende il comportamento senza modificarlo.</a:t>
             </a:r>
           </a:p>
@@ -3473,6 +3487,7 @@
               <a:defRPr sz="2000"/>
             </a:pPr>
             <a:r>
+              <a:rPr/>
               <a:t>Si basa sulla composizione, come alternativa all'ereditarietà.</a:t>
             </a:r>
           </a:p>
@@ -3484,6 +3499,7 @@
               <a:defRPr sz="2000"/>
             </a:pPr>
             <a:r>
+              <a:rPr/>
               <a:t>Più decorator possono essere combinati a runtime.</a:t>
             </a:r>
           </a:p>
@@ -3495,6 +3511,7 @@
               <a:defRPr sz="2000"/>
             </a:pPr>
             <a:r>
+              <a:rPr/>
               <a:t>Favorisce flessibilità, riuso e principio Open/Closed.</a:t>
             </a:r>
           </a:p>
@@ -3567,28 +3584,34 @@
               </a:defRPr>
             </a:pPr>
             <a:r>
+              <a:rPr/>
               <a:t>Shape circle = new Circle();</a:t>
             </a:r>
             <a:br/>
             <a:br/>
             <a:r>
+              <a:rPr/>
               <a:t>Shape redCircle =</a:t>
             </a:r>
             <a:br/>
             <a:r>
+              <a:rPr/>
               <a:t>    new RedShapeDecorator(new Circle());</a:t>
             </a:r>
             <a:br/>
             <a:br/>
             <a:r>
+              <a:rPr/>
               <a:t>redCircle.draw();</a:t>
             </a:r>
             <a:br/>
             <a:r>
+              <a:rPr/>
               <a:t>// Shape: Circle</a:t>
             </a:r>
             <a:br/>
             <a:r>
+              <a:rPr/>
               <a:t>// Border Color: Red</a:t>
             </a:r>
           </a:p>
@@ -3638,6 +3661,7 @@
               <a:defRPr sz="3000" b="1"/>
             </a:pPr>
             <a:r>
+              <a:rPr/>
               <a:t>Facade Pattern</a:t>
             </a:r>
           </a:p>
@@ -3669,6 +3693,7 @@
               <a:defRPr sz="1500"/>
             </a:pPr>
             <a:r>
+              <a:rPr/>
               <a:t>Strutturale — semplificare un sistema complesso</a:t>
             </a:r>
           </a:p>
@@ -3703,6 +3728,7 @@
               <a:defRPr sz="2000"/>
             </a:pPr>
             <a:r>
+              <a:rPr/>
               <a:t>Fornisce un'interfaccia unificata e semplice.</a:t>
             </a:r>
           </a:p>
@@ -3714,6 +3740,7 @@
               <a:defRPr sz="2000"/>
             </a:pPr>
             <a:r>
+              <a:rPr/>
               <a:t>La Facade nasconde la complessità dei sottosistemi.</a:t>
             </a:r>
           </a:p>
@@ -3725,6 +3752,7 @@
               <a:defRPr sz="2000"/>
             </a:pPr>
             <a:r>
+              <a:rPr/>
               <a:t>Il client interagisce con un punto di ingresso più semplice.</a:t>
             </a:r>
           </a:p>
@@ -3736,6 +3764,7 @@
               <a:defRPr sz="2000"/>
             </a:pPr>
             <a:r>
+              <a:rPr/>
               <a:t>Utile per ridurre la complessità percepita e migliorare la manutenibilità.</a:t>
             </a:r>
           </a:p>
@@ -3778,6 +3807,7 @@
               <a:defRPr sz="1700" b="1"/>
             </a:pPr>
             <a:r>
+              <a:rPr/>
               <a:t>CLIENT</a:t>
             </a:r>
           </a:p>
@@ -3820,6 +3850,7 @@
               <a:defRPr sz="1700" b="1"/>
             </a:pPr>
             <a:r>
+              <a:rPr/>
               <a:t>FACADE</a:t>
             </a:r>
           </a:p>
@@ -3862,16 +3893,19 @@
               <a:defRPr sz="1700" b="1"/>
             </a:pPr>
             <a:r>
+              <a:rPr/>
               <a:t>Amplificatore</a:t>
             </a:r>
           </a:p>
           <a:p>
             <a:r>
+              <a:rPr/>
               <a:t>DVD</a:t>
             </a:r>
           </a:p>
           <a:p>
             <a:r>
+              <a:rPr/>
               <a:t>Luci</a:t>
             </a:r>
           </a:p>
@@ -3921,6 +3955,7 @@
               <a:defRPr sz="3000" b="1"/>
             </a:pPr>
             <a:r>
+              <a:rPr/>
               <a:t>Observer Pattern</a:t>
             </a:r>
           </a:p>
@@ -3952,6 +3987,7 @@
               <a:defRPr sz="1500"/>
             </a:pPr>
             <a:r>
+              <a:rPr/>
               <a:t>Comportamentale — notificare gli interessati</a:t>
             </a:r>
           </a:p>
@@ -3986,6 +4022,7 @@
               <a:defRPr sz="2000"/>
             </a:pPr>
             <a:r>
+              <a:rPr/>
               <a:t>Definisce una dipendenza uno-a-molti.</a:t>
             </a:r>
           </a:p>
@@ -3997,6 +4034,7 @@
               <a:defRPr sz="2000"/>
             </a:pPr>
             <a:r>
+              <a:rPr/>
               <a:t>Quando il Subject cambia stato, notifica gli Observer.</a:t>
             </a:r>
           </a:p>
@@ -4008,6 +4046,7 @@
               <a:defRPr sz="2000"/>
             </a:pPr>
             <a:r>
+              <a:rPr/>
               <a:t>Il Subject mantiene l'elenco degli osservatori.</a:t>
             </a:r>
           </a:p>
@@ -4019,6 +4058,7 @@
               <a:defRPr sz="2000"/>
             </a:pPr>
             <a:r>
+              <a:rPr/>
               <a:t>Nuovi Observer possono essere aggiunti senza modificare il Subject.</a:t>
             </a:r>
           </a:p>
@@ -4030,6 +4070,7 @@
               <a:defRPr sz="2000"/>
             </a:pPr>
             <a:r>
+              <a:rPr/>
               <a:t>Molto utile per eventi, GUI e notifiche di stato.</a:t>
             </a:r>
           </a:p>
@@ -4072,6 +4113,7 @@
               <a:defRPr sz="1700" b="1"/>
             </a:pPr>
             <a:r>
+              <a:rPr/>
               <a:t>SUBJECT</a:t>
             </a:r>
           </a:p>
@@ -4114,6 +4156,7 @@
               <a:defRPr sz="1700" b="1"/>
             </a:pPr>
             <a:r>
+              <a:rPr/>
               <a:t>Observer 1</a:t>
             </a:r>
           </a:p>
@@ -4156,6 +4199,7 @@
               <a:defRPr sz="1700" b="1"/>
             </a:pPr>
             <a:r>
+              <a:rPr/>
               <a:t>Observer 2</a:t>
             </a:r>
           </a:p>
@@ -4198,6 +4242,7 @@
               <a:defRPr sz="1700" b="1"/>
             </a:pPr>
             <a:r>
+              <a:rPr/>
               <a:t>Observer 3</a:t>
             </a:r>
           </a:p>
@@ -4247,6 +4292,7 @@
               <a:defRPr sz="3000" b="1"/>
             </a:pPr>
             <a:r>
+              <a:rPr/>
               <a:t>Strategy Pattern</a:t>
             </a:r>
           </a:p>
@@ -4281,6 +4327,7 @@
               <a:defRPr sz="2100"/>
             </a:pPr>
             <a:r>
+              <a:rPr/>
               <a:t>Definisce una famiglia di algoritmi intercambiabili.</a:t>
             </a:r>
           </a:p>
@@ -4292,6 +4339,7 @@
               <a:defRPr sz="2100"/>
             </a:pPr>
             <a:r>
+              <a:rPr/>
               <a:t>Ogni strategia implementa un'interfaccia comune.</a:t>
             </a:r>
           </a:p>
@@ -4303,6 +4351,7 @@
               <a:defRPr sz="2100"/>
             </a:pPr>
             <a:r>
+              <a:rPr/>
               <a:t>Il client può cambiare algoritmo senza cambiare l'oggetto che lo utilizza.</a:t>
             </a:r>
           </a:p>
@@ -4314,6 +4363,7 @@
               <a:defRPr sz="2100"/>
             </a:pPr>
             <a:r>
+              <a:rPr/>
               <a:t>È un'applicazione naturale del polimorfismo.</a:t>
             </a:r>
           </a:p>
@@ -4372,7 +4422,14 @@
           <a:prstGeom prst="rect">
             <a:avLst/>
           </a:prstGeom>
-          <a:noFill/>
+          <a:solidFill>
+            <a:srgbClr val="F5F5F5"/>
+          </a:solidFill>
+          <a:ln w="12700">
+            <a:solidFill>
+              <a:srgbClr val="B4B4B4"/>
+            </a:solidFill>
+          </a:ln>
         </p:spPr>
         <p:txBody>
           <a:bodyPr wrap="none">
@@ -4382,18 +4439,39 @@
           <a:p>
             <a:pPr>
               <a:defRPr sz="1700">
+                <a:solidFill>
+                  <a:srgbClr val="1E1E1E"/>
+                </a:solidFill>
                 <a:latin typeface="Courier New"/>
               </a:defRPr>
             </a:pPr>
             <a:r>
+              <a:rPr>
+                <a:solidFill>
+                  <a:srgbClr val="1E1E1E"/>
+                </a:solidFill>
+                <a:latin typeface="Courier New"/>
+              </a:rPr>
               <a:t>Strategia strategia = new StrategiaConcreta();</a:t>
             </a:r>
             <a:br/>
             <a:r>
+              <a:rPr>
+                <a:solidFill>
+                  <a:srgbClr val="1E1E1E"/>
+                </a:solidFill>
+                <a:latin typeface="Courier New"/>
+              </a:rPr>
               <a:t>contesto.setStrategia(strategia);</a:t>
             </a:r>
             <a:br/>
             <a:r>
+              <a:rPr>
+                <a:solidFill>
+                  <a:srgbClr val="1E1E1E"/>
+                </a:solidFill>
+                <a:latin typeface="Courier New"/>
+              </a:rPr>
               <a:t>contesto.esegui();</a:t>
             </a:r>
           </a:p>
@@ -4443,6 +4521,7 @@
               <a:defRPr sz="3000" b="1"/>
             </a:pPr>
             <a:r>
+              <a:rPr/>
               <a:t>Command Pattern</a:t>
             </a:r>
           </a:p>
@@ -4477,6 +4556,7 @@
               <a:defRPr sz="2100"/>
             </a:pPr>
             <a:r>
+              <a:rPr/>
               <a:t>Incapsula una richiesta come oggetto.</a:t>
             </a:r>
           </a:p>
@@ -4488,6 +4568,7 @@
               <a:defRPr sz="2100"/>
             </a:pPr>
             <a:r>
+              <a:rPr/>
               <a:t>Definisce un'interfaccia di comando, tipicamente con execute().</a:t>
             </a:r>
           </a:p>
@@ -4499,6 +4580,7 @@
               <a:defRPr sz="2100"/>
             </a:pPr>
             <a:r>
+              <a:rPr/>
               <a:t>Permette di rappresentare richieste diverse con oggetti diversi.</a:t>
             </a:r>
           </a:p>
@@ -4510,6 +4592,7 @@
               <a:defRPr sz="2100"/>
             </a:pPr>
             <a:r>
+              <a:rPr/>
               <a:t>Utile per code, registrazione delle richieste e operazioni differibili.</a:t>
             </a:r>
           </a:p>
@@ -4568,7 +4651,14 @@
           <a:prstGeom prst="rect">
             <a:avLst/>
           </a:prstGeom>
-          <a:noFill/>
+          <a:solidFill>
+            <a:srgbClr val="F5F5F5"/>
+          </a:solidFill>
+          <a:ln w="12700">
+            <a:solidFill>
+              <a:srgbClr val="B4B4B4"/>
+            </a:solidFill>
+          </a:ln>
         </p:spPr>
         <p:txBody>
           <a:bodyPr wrap="none">
@@ -4578,27 +4668,60 @@
           <a:p>
             <a:pPr>
               <a:defRPr sz="1600">
+                <a:solidFill>
+                  <a:srgbClr val="1E1E1E"/>
+                </a:solidFill>
                 <a:latin typeface="Courier New"/>
               </a:defRPr>
             </a:pPr>
             <a:r>
+              <a:rPr>
+                <a:solidFill>
+                  <a:srgbClr val="1E1E1E"/>
+                </a:solidFill>
+                <a:latin typeface="Courier New"/>
+              </a:rPr>
               <a:t>public interface Command {</a:t>
             </a:r>
             <a:br/>
             <a:r>
+              <a:rPr>
+                <a:solidFill>
+                  <a:srgbClr val="1E1E1E"/>
+                </a:solidFill>
+                <a:latin typeface="Courier New"/>
+              </a:rPr>
               <a:t>    void execute();</a:t>
             </a:r>
             <a:br/>
             <a:r>
+              <a:rPr>
+                <a:solidFill>
+                  <a:srgbClr val="1E1E1E"/>
+                </a:solidFill>
+                <a:latin typeface="Courier New"/>
+              </a:rPr>
               <a:t>}</a:t>
             </a:r>
             <a:br/>
             <a:br/>
             <a:r>
+              <a:rPr>
+                <a:solidFill>
+                  <a:srgbClr val="1E1E1E"/>
+                </a:solidFill>
+                <a:latin typeface="Courier New"/>
+              </a:rPr>
               <a:t>// ConcreteCommand rappresenta una richiesta</a:t>
             </a:r>
             <a:br/>
             <a:r>
+              <a:rPr>
+                <a:solidFill>
+                  <a:srgbClr val="1E1E1E"/>
+                </a:solidFill>
+                <a:latin typeface="Courier New"/>
+              </a:rPr>
               <a:t>// specifica e implementa execute().</a:t>
             </a:r>
           </a:p>
@@ -4648,6 +4771,7 @@
               <a:defRPr sz="3000" b="1"/>
             </a:pPr>
             <a:r>
+              <a:rPr/>
               <a:t>Come scegliere un Pattern?</a:t>
             </a:r>
           </a:p>
@@ -4682,6 +4806,7 @@
               <a:defRPr sz="2100"/>
             </a:pPr>
             <a:r>
+              <a:rPr/>
               <a:t>Chiediti prima qual è il problema di progettazione.</a:t>
             </a:r>
           </a:p>
@@ -4693,6 +4818,7 @@
               <a:defRPr sz="2100"/>
             </a:pPr>
             <a:r>
+              <a:rPr/>
               <a:t>Devo controllare come vengono creati gli oggetti? → Creazionali.</a:t>
             </a:r>
           </a:p>
@@ -4704,6 +4830,7 @@
               <a:defRPr sz="2100"/>
             </a:pPr>
             <a:r>
+              <a:rPr/>
               <a:t>Devo combinare o adattare componenti? → Strutturali.</a:t>
             </a:r>
           </a:p>
@@ -4715,6 +4842,7 @@
               <a:defRPr sz="2100"/>
             </a:pPr>
             <a:r>
+              <a:rPr/>
               <a:t>Devo gestire algoritmi, eventi o collaborazione tra oggetti? → Comportamentali.</a:t>
             </a:r>
           </a:p>
@@ -4726,6 +4854,7 @@
               <a:defRPr sz="2100"/>
             </a:pPr>
             <a:r>
+              <a:rPr/>
               <a:t>Il pattern deve semplificare il progetto, non renderlo più complicato.</a:t>
             </a:r>
           </a:p>
@@ -4775,6 +4904,7 @@
               <a:defRPr sz="3000" b="1"/>
             </a:pPr>
             <a:r>
+              <a:rPr/>
               <a:t>Pattern e principi di progettazione</a:t>
             </a:r>
           </a:p>
@@ -4809,6 +4939,7 @@
               <a:defRPr sz="2000"/>
             </a:pPr>
             <a:r>
+              <a:rPr/>
               <a:t>I pattern non sono obiettivi: sono strumenti.</a:t>
             </a:r>
           </a:p>
@@ -4820,6 +4951,7 @@
               <a:defRPr sz="2000"/>
             </a:pPr>
             <a:r>
+              <a:rPr/>
               <a:t>Favoriscono riduzione dell'accoppiamento e maggiore flessibilità.</a:t>
             </a:r>
           </a:p>
@@ -4831,6 +4963,7 @@
               <a:defRPr sz="2000"/>
             </a:pPr>
             <a:r>
+              <a:rPr/>
               <a:t>Interfacce e astrazioni permettono di separare ciò che cambia da ciò che resta stabile.</a:t>
             </a:r>
           </a:p>
@@ -4842,6 +4975,7 @@
               <a:defRPr sz="2000"/>
             </a:pPr>
             <a:r>
+              <a:rPr/>
               <a:t>Decorator e Strategy mostrano bene il vantaggio della composizione rispetto a gerarchie rigide.</a:t>
             </a:r>
           </a:p>
@@ -4853,6 +4987,7 @@
               <a:defRPr sz="2000"/>
             </a:pPr>
             <a:r>
+              <a:rPr/>
               <a:t>Una buona progettazione sceglie il pattern solo quando risolve realmente un problema.</a:t>
             </a:r>
           </a:p>
@@ -4902,6 +5037,7 @@
               <a:defRPr sz="3000" b="1"/>
             </a:pPr>
             <a:r>
+              <a:rPr/>
               <a:t>Altri pattern e architetture</a:t>
             </a:r>
           </a:p>
@@ -4936,6 +5072,7 @@
               <a:defRPr sz="2000"/>
             </a:pPr>
             <a:r>
+              <a:rPr/>
               <a:t>MVC — Model View Controller: separazione tra dati, presentazione e controllo.</a:t>
             </a:r>
           </a:p>
@@ -4947,6 +5084,7 @@
               <a:defRPr sz="2000"/>
             </a:pPr>
             <a:r>
+              <a:rPr/>
               <a:t>DAO — Data Access Object: separazione dell'accesso ai dati.</a:t>
             </a:r>
           </a:p>
@@ -4958,6 +5096,7 @@
               <a:defRPr sz="2000"/>
             </a:pPr>
             <a:r>
+              <a:rPr/>
               <a:t>Dependency Injection: separa il comportamento di una componente dalla risoluzione delle sue dipendenze.</a:t>
             </a:r>
           </a:p>
@@ -4969,6 +5108,7 @@
               <a:defRPr sz="2000"/>
             </a:pPr>
             <a:r>
+              <a:rPr/>
               <a:t>Questi approcci si affiancano ai pattern GoF e possono comparire nella progettazione di applicazioni reali.</a:t>
             </a:r>
           </a:p>
@@ -5018,6 +5158,7 @@
               <a:defRPr sz="3000" b="1"/>
             </a:pPr>
             <a:r>
+              <a:rPr/>
               <a:t>Confronto rapido</a:t>
             </a:r>
           </a:p>
@@ -5052,6 +5193,7 @@
               <a:defRPr sz="2000"/>
             </a:pPr>
             <a:r>
+              <a:rPr/>
               <a:t>Singleton → una sola istanza.</a:t>
             </a:r>
           </a:p>
@@ -5063,6 +5205,7 @@
               <a:defRPr sz="2000"/>
             </a:pPr>
             <a:r>
+              <a:rPr/>
               <a:t>Factory → delegare la creazione.</a:t>
             </a:r>
           </a:p>
@@ -5074,6 +5217,7 @@
               <a:defRPr sz="2000"/>
             </a:pPr>
             <a:r>
+              <a:rPr/>
               <a:t>Builder → costruzione passo dopo passo.</a:t>
             </a:r>
           </a:p>
@@ -5085,6 +5229,7 @@
               <a:defRPr sz="2000"/>
             </a:pPr>
             <a:r>
+              <a:rPr/>
               <a:t>Decorator → aggiungere responsabilità.</a:t>
             </a:r>
           </a:p>
@@ -5096,6 +5241,7 @@
               <a:defRPr sz="2000"/>
             </a:pPr>
             <a:r>
+              <a:rPr/>
               <a:t>Facade → semplificare un sottosistema.</a:t>
             </a:r>
           </a:p>
@@ -5107,6 +5253,7 @@
               <a:defRPr sz="2000"/>
             </a:pPr>
             <a:r>
+              <a:rPr/>
               <a:t>Observer → notificare più dipendenti.</a:t>
             </a:r>
           </a:p>
@@ -5118,6 +5265,7 @@
               <a:defRPr sz="2000"/>
             </a:pPr>
             <a:r>
+              <a:rPr/>
               <a:t>Strategy → sostituire un algoritmo.</a:t>
             </a:r>
           </a:p>
@@ -5129,6 +5277,7 @@
               <a:defRPr sz="2000"/>
             </a:pPr>
             <a:r>
+              <a:rPr/>
               <a:t>Command → trasformare una richiesta in un oggetto.</a:t>
             </a:r>
           </a:p>
@@ -5178,6 +5327,7 @@
               <a:defRPr sz="3000" b="1"/>
             </a:pPr>
             <a:r>
+              <a:rPr/>
               <a:t>Che cos'è un Design Pattern?</a:t>
             </a:r>
           </a:p>
@@ -5212,6 +5362,7 @@
               <a:defRPr sz="2100"/>
             </a:pPr>
             <a:r>
+              <a:rPr/>
               <a:t>Una soluzione generale a un problema ricorrente nella progettazione del software.</a:t>
             </a:r>
           </a:p>
@@ -5223,6 +5374,7 @@
               <a:defRPr sz="2100"/>
             </a:pPr>
             <a:r>
+              <a:rPr/>
               <a:t>Non è una libreria e non è codice da copiare: è uno schema progettuale.</a:t>
             </a:r>
           </a:p>
@@ -5234,6 +5386,7 @@
               <a:defRPr sz="2100"/>
             </a:pPr>
             <a:r>
+              <a:rPr/>
               <a:t>Fornisce un linguaggio comune tra sviluppatori.</a:t>
             </a:r>
           </a:p>
@@ -5245,6 +5398,7 @@
               <a:defRPr sz="2100"/>
             </a:pPr>
             <a:r>
+              <a:rPr/>
               <a:t>Obiettivo: migliorare manutenibilità, flessibilità, riuso e comprensibilità.</a:t>
             </a:r>
           </a:p>
@@ -5256,6 +5410,7 @@
               <a:defRPr sz="2100"/>
             </a:pPr>
             <a:r>
+              <a:rPr/>
               <a:t>Va usato con discernimento: non ogni problema richiede un pattern.</a:t>
             </a:r>
           </a:p>
@@ -5305,6 +5460,7 @@
               <a:defRPr sz="3000" b="1"/>
             </a:pPr>
             <a:r>
+              <a:rPr/>
               <a:t>Esercitazione finale</a:t>
             </a:r>
           </a:p>
@@ -5339,6 +5495,7 @@
               <a:defRPr sz="2000"/>
             </a:pPr>
             <a:r>
+              <a:rPr/>
               <a:t>Progettare un'applicazione Java per la gestione di un sistema a scelta.</a:t>
             </a:r>
           </a:p>
@@ -5350,6 +5507,7 @@
               <a:defRPr sz="2000"/>
             </a:pPr>
             <a:r>
+              <a:rPr/>
               <a:t>Individuare almeno 3 problemi di progettazione ricorrenti.</a:t>
             </a:r>
           </a:p>
@@ -5361,6 +5519,7 @@
               <a:defRPr sz="2000"/>
             </a:pPr>
             <a:r>
+              <a:rPr/>
               <a:t>Selezionare un Design Pattern adatto per ciascun problema.</a:t>
             </a:r>
           </a:p>
@@ -5372,6 +5531,7 @@
               <a:defRPr sz="2000"/>
             </a:pPr>
             <a:r>
+              <a:rPr/>
               <a:t>Realizzare una versione funzionante con interfacce e classi concrete.</a:t>
             </a:r>
           </a:p>
@@ -5383,6 +5543,7 @@
               <a:defRPr sz="2000"/>
             </a:pPr>
             <a:r>
+              <a:rPr/>
               <a:t>Documentare: problema → pattern scelto → struttura → vantaggi → eventuali criticità.</a:t>
             </a:r>
           </a:p>
@@ -5394,6 +5555,7 @@
               <a:defRPr sz="2000"/>
             </a:pPr>
             <a:r>
+              <a:rPr/>
               <a:t>Confrontare brevemente la soluzione con una versione senza pattern.</a:t>
             </a:r>
           </a:p>
@@ -5443,6 +5605,7 @@
               <a:defRPr sz="3000" b="1"/>
             </a:pPr>
             <a:r>
+              <a:rPr/>
               <a:t>Riepilogo</a:t>
             </a:r>
           </a:p>
@@ -5477,6 +5640,7 @@
               <a:defRPr sz="2100"/>
             </a:pPr>
             <a:r>
+              <a:rPr/>
               <a:t>Un Design Pattern è uno schema riutilizzabile per un problema ricorrente.</a:t>
             </a:r>
           </a:p>
@@ -5488,6 +5652,7 @@
               <a:defRPr sz="2100"/>
             </a:pPr>
             <a:r>
+              <a:rPr/>
               <a:t>I GoF raggruppano 23 pattern in creazionali, strutturali e comportamentali.</a:t>
             </a:r>
           </a:p>
@@ -5499,6 +5664,7 @@
               <a:defRPr sz="2100"/>
             </a:pPr>
             <a:r>
+              <a:rPr/>
               <a:t>I pattern aiutano a gestire creazione, composizione e collaborazione tra oggetti.</a:t>
             </a:r>
           </a:p>
@@ -5510,6 +5676,7 @@
               <a:defRPr sz="2100"/>
             </a:pPr>
             <a:r>
+              <a:rPr/>
               <a:t>Singleton, Factory, Builder, Decorator, Facade, Observer, Strategy e Command sono esempi fondamentali.</a:t>
             </a:r>
           </a:p>
@@ -5521,6 +5688,7 @@
               <a:defRPr sz="2100"/>
             </a:pPr>
             <a:r>
+              <a:rPr/>
               <a:t>La qualità sta nell'uso appropriato del pattern, non nel numero di pattern utilizzati.</a:t>
             </a:r>
           </a:p>
@@ -5570,6 +5738,7 @@
               <a:defRPr sz="3000" b="1"/>
             </a:pPr>
             <a:r>
+              <a:rPr/>
               <a:t>I Pattern GoF — Gang of Four</a:t>
             </a:r>
           </a:p>
@@ -5604,6 +5773,7 @@
               <a:defRPr sz="2300"/>
             </a:pPr>
             <a:r>
+              <a:rPr/>
               <a:t>23 pattern descritti nel testo di riferimento della Gang of Four.</a:t>
             </a:r>
           </a:p>
@@ -5615,6 +5785,7 @@
               <a:defRPr sz="2300"/>
             </a:pPr>
             <a:r>
+              <a:rPr/>
               <a:t>Creazionali → riguardano la creazione degli oggetti.</a:t>
             </a:r>
           </a:p>
@@ -5626,6 +5797,7 @@
               <a:defRPr sz="2300"/>
             </a:pPr>
             <a:r>
+              <a:rPr/>
               <a:t>Strutturali → riguardano la composizione di classi e oggetti.</a:t>
             </a:r>
           </a:p>
@@ -5637,6 +5809,7 @@
               <a:defRPr sz="2300"/>
             </a:pPr>
             <a:r>
+              <a:rPr/>
               <a:t>Comportamentali → riguardano la collaborazione e il comportamento degli oggetti.</a:t>
             </a:r>
           </a:p>
@@ -5679,11 +5852,13 @@
               <a:defRPr sz="1700" b="1"/>
             </a:pPr>
             <a:r>
+              <a:rPr/>
               <a:t>CREAZIONALI</a:t>
             </a:r>
           </a:p>
           <a:p>
             <a:r>
+              <a:rPr/>
               <a:t>5</a:t>
             </a:r>
           </a:p>
@@ -5726,11 +5901,13 @@
               <a:defRPr sz="1700" b="1"/>
             </a:pPr>
             <a:r>
+              <a:rPr/>
               <a:t>STRUTTURALI</a:t>
             </a:r>
           </a:p>
           <a:p>
             <a:r>
+              <a:rPr/>
               <a:t>7</a:t>
             </a:r>
           </a:p>
@@ -5773,11 +5950,13 @@
               <a:defRPr sz="1700" b="1"/>
             </a:pPr>
             <a:r>
+              <a:rPr/>
               <a:t>COMPORTAMENTALI</a:t>
             </a:r>
           </a:p>
           <a:p>
             <a:r>
+              <a:rPr/>
               <a:t>11</a:t>
             </a:r>
           </a:p>
@@ -5827,6 +6006,7 @@
               <a:defRPr sz="3000" b="1"/>
             </a:pPr>
             <a:r>
+              <a:rPr/>
               <a:t>Pattern creazionali</a:t>
             </a:r>
           </a:p>
@@ -5861,6 +6041,7 @@
               <a:defRPr sz="2100"/>
             </a:pPr>
             <a:r>
+              <a:rPr/>
               <a:t>Rendono il sistema più indipendente dalle implementazioni concrete.</a:t>
             </a:r>
           </a:p>
@@ -5872,6 +6053,7 @@
               <a:defRPr sz="2100"/>
             </a:pPr>
             <a:r>
+              <a:rPr/>
               <a:t>Nascondono i dettagli relativi alla creazione e composizione degli oggetti.</a:t>
             </a:r>
           </a:p>
@@ -5883,6 +6065,7 @@
               <a:defRPr sz="2100"/>
             </a:pPr>
             <a:r>
+              <a:rPr/>
               <a:t>Usano ampiamente astrazioni e interfacce.</a:t>
             </a:r>
           </a:p>
@@ -5894,6 +6077,7 @@
               <a:defRPr sz="2100"/>
             </a:pPr>
             <a:r>
+              <a:rPr/>
               <a:t>Principali GoF: Factory Method, Abstract Factory, Singleton, Prototype, Builder.</a:t>
             </a:r>
           </a:p>
@@ -5943,6 +6127,7 @@
               <a:defRPr sz="3000" b="1"/>
             </a:pPr>
             <a:r>
+              <a:rPr/>
               <a:t>Pattern strutturali</a:t>
             </a:r>
           </a:p>
@@ -5977,6 +6162,7 @@
               <a:defRPr sz="2100"/>
             </a:pPr>
             <a:r>
+              <a:rPr/>
               <a:t>Affrontano problemi relativi alla composizione di classi e oggetti.</a:t>
             </a:r>
           </a:p>
@@ -5988,6 +6174,7 @@
               <a:defRPr sz="2100"/>
             </a:pPr>
             <a:r>
+              <a:rPr/>
               <a:t>Permettono di riutilizzare componenti esistenti attraverso interfacce più adatte.</a:t>
             </a:r>
           </a:p>
@@ -5999,6 +6186,7 @@
               <a:defRPr sz="2100"/>
             </a:pPr>
             <a:r>
+              <a:rPr/>
               <a:t>Sono utili per integrare librerie o componenti differenti.</a:t>
             </a:r>
           </a:p>
@@ -6010,6 +6198,7 @@
               <a:defRPr sz="2100"/>
             </a:pPr>
             <a:r>
+              <a:rPr/>
               <a:t>Principali GoF: Adapter, Bridge, Composite, Decorator, Facade, Flyweight, Proxy.</a:t>
             </a:r>
           </a:p>
@@ -6059,6 +6248,7 @@
               <a:defRPr sz="3000" b="1"/>
             </a:pPr>
             <a:r>
+              <a:rPr/>
               <a:t>Pattern comportamentali</a:t>
             </a:r>
           </a:p>
@@ -6093,6 +6283,7 @@
               <a:defRPr sz="2000"/>
             </a:pPr>
             <a:r>
+              <a:rPr/>
               <a:t>Descrivono come gli oggetti svolgono le proprie funzioni.</a:t>
             </a:r>
           </a:p>
@@ -6104,6 +6295,7 @@
               <a:defRPr sz="2000"/>
             </a:pPr>
             <a:r>
+              <a:rPr/>
               <a:t>Definiscono come diversi oggetti collaborano tra loro.</a:t>
             </a:r>
           </a:p>
@@ -6115,6 +6307,7 @@
               <a:defRPr sz="2000"/>
             </a:pPr>
             <a:r>
+              <a:rPr/>
               <a:t>Principali GoF: Chain of Responsibility, Command, Interpreter, Iterator, Mediator, Memento, Observer, State, Strategy, Template Method, Visitor.</a:t>
             </a:r>
           </a:p>
@@ -6164,6 +6357,7 @@
               <a:defRPr sz="3000" b="1"/>
             </a:pPr>
             <a:r>
+              <a:rPr/>
               <a:t>Singleton Pattern</a:t>
             </a:r>
           </a:p>
@@ -6195,6 +6389,7 @@
               <a:defRPr sz="1500"/>
             </a:pPr>
             <a:r>
+              <a:rPr/>
               <a:t>Creazionale — una sola istanza</a:t>
             </a:r>
           </a:p>
@@ -6229,6 +6424,7 @@
               <a:defRPr sz="2000"/>
             </a:pPr>
             <a:r>
+              <a:rPr/>
               <a:t>Garantisce che una classe abbia una sola istanza.</a:t>
             </a:r>
           </a:p>
@@ -6240,6 +6436,7 @@
               <a:defRPr sz="2000"/>
             </a:pPr>
             <a:r>
+              <a:rPr/>
               <a:t>Fornisce un punto di accesso globale all'istanza.</a:t>
             </a:r>
           </a:p>
@@ -6251,6 +6448,7 @@
               <a:defRPr sz="2000"/>
             </a:pPr>
             <a:r>
+              <a:rPr/>
               <a:t>Tipicamente: costruttore privato + variabile statica + getInstance().</a:t>
             </a:r>
           </a:p>
@@ -6262,6 +6460,7 @@
               <a:defRPr sz="2000"/>
             </a:pPr>
             <a:r>
+              <a:rPr/>
               <a:t>Attenzione a thread safety, serializzazione e accoppiamento globale.</a:t>
             </a:r>
           </a:p>
@@ -6320,7 +6519,14 @@
           <a:prstGeom prst="rect">
             <a:avLst/>
           </a:prstGeom>
-          <a:noFill/>
+          <a:solidFill>
+            <a:srgbClr val="F5F5F5"/>
+          </a:solidFill>
+          <a:ln w="12700">
+            <a:solidFill>
+              <a:srgbClr val="B4B4B4"/>
+            </a:solidFill>
+          </a:ln>
         </p:spPr>
         <p:txBody>
           <a:bodyPr wrap="none">
@@ -6330,44 +6536,101 @@
           <a:p>
             <a:pPr>
               <a:defRPr sz="1500">
+                <a:solidFill>
+                  <a:srgbClr val="1E1E1E"/>
+                </a:solidFill>
                 <a:latin typeface="Courier New"/>
               </a:defRPr>
             </a:pPr>
             <a:r>
+              <a:rPr>
+                <a:solidFill>
+                  <a:srgbClr val="1E1E1E"/>
+                </a:solidFill>
+                <a:latin typeface="Courier New"/>
+              </a:rPr>
               <a:t>public class Singleton {</a:t>
             </a:r>
             <a:br/>
             <a:r>
+              <a:rPr>
+                <a:solidFill>
+                  <a:srgbClr val="1E1E1E"/>
+                </a:solidFill>
+                <a:latin typeface="Courier New"/>
+              </a:rPr>
               <a:t>    private static Singleton instance;</a:t>
             </a:r>
             <a:br/>
             <a:br/>
             <a:r>
+              <a:rPr>
+                <a:solidFill>
+                  <a:srgbClr val="1E1E1E"/>
+                </a:solidFill>
+                <a:latin typeface="Courier New"/>
+              </a:rPr>
               <a:t>    private Singleton() {}</a:t>
             </a:r>
             <a:br/>
             <a:br/>
             <a:r>
+              <a:rPr>
+                <a:solidFill>
+                  <a:srgbClr val="1E1E1E"/>
+                </a:solidFill>
+                <a:latin typeface="Courier New"/>
+              </a:rPr>
               <a:t>    public static Singleton getInstance() {</a:t>
             </a:r>
             <a:br/>
             <a:r>
+              <a:rPr>
+                <a:solidFill>
+                  <a:srgbClr val="1E1E1E"/>
+                </a:solidFill>
+                <a:latin typeface="Courier New"/>
+              </a:rPr>
               <a:t>        if (instance == null)</a:t>
             </a:r>
             <a:br/>
             <a:r>
+              <a:rPr>
+                <a:solidFill>
+                  <a:srgbClr val="1E1E1E"/>
+                </a:solidFill>
+                <a:latin typeface="Courier New"/>
+              </a:rPr>
               <a:t>            instance = new Singleton();</a:t>
             </a:r>
             <a:br/>
             <a:r>
+              <a:rPr>
+                <a:solidFill>
+                  <a:srgbClr val="1E1E1E"/>
+                </a:solidFill>
+                <a:latin typeface="Courier New"/>
+              </a:rPr>
               <a:t>        return instance;</a:t>
             </a:r>
             <a:br/>
             <a:r>
+              <a:rPr>
+                <a:solidFill>
+                  <a:srgbClr val="1E1E1E"/>
+                </a:solidFill>
+                <a:latin typeface="Courier New"/>
+              </a:rPr>
               <a:t>    }</a:t>
             </a:r>
             <a:br/>
             <a:r>
+              <a:rPr>
+                <a:solidFill>
+                  <a:srgbClr val="1E1E1E"/>
+                </a:solidFill>
+                <a:latin typeface="Courier New"/>
+              </a:rPr>
               <a:t>}</a:t>
             </a:r>
           </a:p>
@@ -6417,6 +6680,7 @@
               <a:defRPr sz="3000" b="1"/>
             </a:pPr>
             <a:r>
+              <a:rPr/>
               <a:t>Factory Pattern</a:t>
             </a:r>
           </a:p>
@@ -6448,6 +6712,7 @@
               <a:defRPr sz="1500"/>
             </a:pPr>
             <a:r>
+              <a:rPr/>
               <a:t>Creazionale — delegare la creazione</a:t>
             </a:r>
           </a:p>
@@ -6482,6 +6747,7 @@
               <a:defRPr sz="2000"/>
             </a:pPr>
             <a:r>
+              <a:rPr/>
               <a:t>Incapsula la creazione degli oggetti.</a:t>
             </a:r>
           </a:p>
@@ -6493,6 +6759,7 @@
               <a:defRPr sz="2000"/>
             </a:pPr>
             <a:r>
+              <a:rPr/>
               <a:t>Il client lavora con l'interfaccia del prodotto, non con la classe concreta.</a:t>
             </a:r>
           </a:p>
@@ -6504,6 +6771,7 @@
               <a:defRPr sz="2000"/>
             </a:pPr>
             <a:r>
+              <a:rPr/>
               <a:t>La scelta del tipo concreto può essere delegata alla factory.</a:t>
             </a:r>
           </a:p>
@@ -6515,6 +6783,7 @@
               <a:defRPr sz="2000"/>
             </a:pPr>
             <a:r>
+              <a:rPr/>
               <a:t>Riduce l'accoppiamento e facilita l'estensione.</a:t>
             </a:r>
           </a:p>
@@ -6573,7 +6842,14 @@
           <a:prstGeom prst="rect">
             <a:avLst/>
           </a:prstGeom>
-          <a:noFill/>
+          <a:solidFill>
+            <a:srgbClr val="F5F5F5"/>
+          </a:solidFill>
+          <a:ln w="12700">
+            <a:solidFill>
+              <a:srgbClr val="B4B4B4"/>
+            </a:solidFill>
+          </a:ln>
         </p:spPr>
         <p:txBody>
           <a:bodyPr wrap="none">
@@ -6583,23 +6859,50 @@
           <a:p>
             <a:pPr>
               <a:defRPr sz="1600">
+                <a:solidFill>
+                  <a:srgbClr val="1E1E1E"/>
+                </a:solidFill>
                 <a:latin typeface="Courier New"/>
               </a:defRPr>
             </a:pPr>
             <a:r>
+              <a:rPr>
+                <a:solidFill>
+                  <a:srgbClr val="1E1E1E"/>
+                </a:solidFill>
+                <a:latin typeface="Courier New"/>
+              </a:rPr>
               <a:t>Shape shape = shapeFactory.getShape("CIRCLE");</a:t>
             </a:r>
             <a:br/>
             <a:r>
+              <a:rPr>
+                <a:solidFill>
+                  <a:srgbClr val="1E1E1E"/>
+                </a:solidFill>
+                <a:latin typeface="Courier New"/>
+              </a:rPr>
               <a:t>shape.draw();</a:t>
             </a:r>
             <a:br/>
             <a:br/>
             <a:r>
+              <a:rPr>
+                <a:solidFill>
+                  <a:srgbClr val="1E1E1E"/>
+                </a:solidFill>
+                <a:latin typeface="Courier New"/>
+              </a:rPr>
               <a:t>// La Factory decide quale classe concreta creare</a:t>
             </a:r>
             <a:br/>
             <a:r>
+              <a:rPr>
+                <a:solidFill>
+                  <a:srgbClr val="1E1E1E"/>
+                </a:solidFill>
+                <a:latin typeface="Courier New"/>
+              </a:rPr>
               <a:t>// Circle, Rectangle, Square, ...</a:t>
             </a:r>
           </a:p>
@@ -6649,6 +6952,7 @@
               <a:defRPr sz="3000" b="1"/>
             </a:pPr>
             <a:r>
+              <a:rPr/>
               <a:t>Builder Pattern</a:t>
             </a:r>
           </a:p>
@@ -6680,6 +6984,7 @@
               <a:defRPr sz="1500"/>
             </a:pPr>
             <a:r>
+              <a:rPr/>
               <a:t>Creazionale — costruire oggetti complessi</a:t>
             </a:r>
           </a:p>
@@ -6714,6 +7019,7 @@
               <a:defRPr sz="2000"/>
             </a:pPr>
             <a:r>
+              <a:rPr/>
               <a:t>Costruisce un oggetto complesso passo dopo passo.</a:t>
             </a:r>
           </a:p>
@@ -6725,6 +7031,7 @@
               <a:defRPr sz="2000"/>
             </a:pPr>
             <a:r>
+              <a:rPr/>
               <a:t>Utile quando ci sono molti parametri opzionali.</a:t>
             </a:r>
           </a:p>
@@ -6736,6 +7043,7 @@
               <a:defRPr sz="2000"/>
             </a:pPr>
             <a:r>
+              <a:rPr/>
               <a:t>Evita costruttori sovraccarichi e combinazioni poco leggibili.</a:t>
             </a:r>
           </a:p>
@@ -6747,6 +7055,7 @@
               <a:defRPr sz="2000"/>
             </a:pPr>
             <a:r>
+              <a:rPr/>
               <a:t>Favorisce una configurazione fluente.</a:t>
             </a:r>
           </a:p>
@@ -6819,18 +7128,22 @@
               </a:defRPr>
             </a:pPr>
             <a:r>
+              <a:rPr/>
               <a:t>Product product = builder</a:t>
             </a:r>
             <a:br/>
             <a:r>
+              <a:rPr/>
               <a:t>    .buildPart1("Parte 1")</a:t>
             </a:r>
             <a:br/>
             <a:r>
+              <a:rPr/>
               <a:t>    .buildPart2("Parte 2")</a:t>
             </a:r>
             <a:br/>
             <a:r>
+              <a:rPr/>
               <a:t>    .getResult();</a:t>
             </a:r>
           </a:p>
